--- a/Aula15_Encerramento_e_Discussao/Aula15_Teoria.pptx
+++ b/Aula15_Encerramento_e_Discussao/Aula15_Teoria.pptx
@@ -1836,8 +1836,9 @@
     <p:bg>
       <p:bgPr>
         <a:solidFill>
-          <a:srgbClr val="0E1B2A"/>
+          <a:srgbClr val="12233B"/>
         </a:solidFill>
+        <a:effectLst/>
       </p:bgPr>
     </p:bg>
     <p:spTree>
@@ -1856,628 +1857,336 @@
       </p:grpSpPr>
       <p:sp>
         <p:nvSpPr>
-          <p:cNvPr id="2" name="Shape 0"/>
-          <p:cNvSpPr/>
-          <p:nvPr/>
-        </p:nvSpPr>
-        <p:spPr>
-          <a:xfrm>
-            <a:off x="0" y="0"/>
-            <a:ext cx="12191695" cy="6858000"/>
-          </a:xfrm>
-          <a:prstGeom prst="rect">
-            <a:avLst/>
-          </a:prstGeom>
-          <a:solidFill>
-            <a:srgbClr val="0E1B2A"/>
-          </a:solidFill>
-          <a:ln w="12700">
-            <a:solidFill>
-              <a:srgbClr val="0E1B2A">
-                <a:alpha val="0"/>
-              </a:srgbClr>
-            </a:solidFill>
-            <a:prstDash val="solid"/>
+          <p:cNvPr id="2" name="Oval 1"/>
+          <p:cNvSpPr/>
+          <p:nvPr/>
+        </p:nvSpPr>
+        <p:spPr>
+          <a:xfrm>
+            <a:off x="8899855" y="-1645920"/>
+            <a:ext cx="4206240" cy="4206240"/>
+          </a:xfrm>
+          <a:prstGeom prst="ellipse">
+            <a:avLst/>
+          </a:prstGeom>
+          <a:solidFill>
+            <a:srgbClr val="2C7A8C">
+              <a:alpha val="12000"/>
+            </a:srgbClr>
+          </a:solidFill>
+          <a:ln>
+            <a:noFill/>
           </a:ln>
-        </p:spPr>
-      </p:sp>
-      <p:sp>
-        <p:nvSpPr>
-          <p:cNvPr id="3" name="Shape 1"/>
-          <p:cNvSpPr/>
-          <p:nvPr/>
-        </p:nvSpPr>
-        <p:spPr>
-          <a:xfrm>
-            <a:off x="0" y="0"/>
-            <a:ext cx="12191695" cy="91440"/>
-          </a:xfrm>
-          <a:prstGeom prst="rect">
-            <a:avLst/>
-          </a:prstGeom>
-          <a:solidFill>
-            <a:srgbClr val="2AA7C9"/>
-          </a:solidFill>
-          <a:ln w="12700">
-            <a:solidFill>
-              <a:srgbClr val="2AA7C9">
-                <a:alpha val="0"/>
-              </a:srgbClr>
-            </a:solidFill>
-            <a:prstDash val="solid"/>
+          <a:effectLst/>
+        </p:spPr>
+        <p:style>
+          <a:lnRef idx="1">
+            <a:schemeClr val="accent1"/>
+          </a:lnRef>
+          <a:fillRef idx="3">
+            <a:schemeClr val="accent1"/>
+          </a:fillRef>
+          <a:effectRef idx="2">
+            <a:schemeClr val="accent1"/>
+          </a:effectRef>
+          <a:fontRef idx="minor">
+            <a:schemeClr val="lt1"/>
+          </a:fontRef>
+        </p:style>
+        <p:txBody>
+          <a:bodyPr rtlCol="0" anchor="ctr"/>
+          <a:lstStyle/>
+          <a:p>
+            <a:pPr algn="ctr"/>
+          </a:p>
+        </p:txBody>
+      </p:sp>
+      <p:sp>
+        <p:nvSpPr>
+          <p:cNvPr id="3" name="Oval 2"/>
+          <p:cNvSpPr/>
+          <p:nvPr/>
+        </p:nvSpPr>
+        <p:spPr>
+          <a:xfrm>
+            <a:off x="10454335" y="548640"/>
+            <a:ext cx="2194560" cy="2194560"/>
+          </a:xfrm>
+          <a:prstGeom prst="ellipse">
+            <a:avLst/>
+          </a:prstGeom>
+          <a:solidFill>
+            <a:srgbClr val="E8963C">
+              <a:alpha val="15000"/>
+            </a:srgbClr>
+          </a:solidFill>
+          <a:ln>
+            <a:noFill/>
           </a:ln>
-        </p:spPr>
-      </p:sp>
-      <p:sp>
-        <p:nvSpPr>
-          <p:cNvPr id="4" name="Text 2"/>
-          <p:cNvSpPr/>
-          <p:nvPr/>
-        </p:nvSpPr>
-        <p:spPr>
-          <a:xfrm>
-            <a:off x="685800" y="777240"/>
-            <a:ext cx="10058400" cy="457200"/>
-          </a:xfrm>
-          <a:prstGeom prst="rect">
-            <a:avLst/>
-          </a:prstGeom>
-          <a:noFill/>
-          <a:ln/>
-        </p:spPr>
-        <p:txBody>
-          <a:bodyPr wrap="square" lIns="0" tIns="0" rIns="0" bIns="0" rtlCol="0" anchor="ctr"/>
-          <a:lstStyle/>
-          <a:p>
-            <a:pPr indent="0" marL="0">
-              <a:buNone/>
-            </a:pPr>
-            <a:r>
-              <a:rPr lang="en-US" sz="2800" b="1" dirty="0">
+          <a:effectLst/>
+        </p:spPr>
+        <p:style>
+          <a:lnRef idx="1">
+            <a:schemeClr val="accent1"/>
+          </a:lnRef>
+          <a:fillRef idx="3">
+            <a:schemeClr val="accent1"/>
+          </a:fillRef>
+          <a:effectRef idx="2">
+            <a:schemeClr val="accent1"/>
+          </a:effectRef>
+          <a:fontRef idx="minor">
+            <a:schemeClr val="lt1"/>
+          </a:fontRef>
+        </p:style>
+        <p:txBody>
+          <a:bodyPr rtlCol="0" anchor="ctr"/>
+          <a:lstStyle/>
+          <a:p>
+            <a:pPr algn="ctr"/>
+          </a:p>
+        </p:txBody>
+      </p:sp>
+      <p:sp>
+        <p:nvSpPr>
+          <p:cNvPr id="4" name="Oval 3"/>
+          <p:cNvSpPr/>
+          <p:nvPr/>
+        </p:nvSpPr>
+        <p:spPr>
+          <a:xfrm>
+            <a:off x="822960" y="914400"/>
+            <a:ext cx="868680" cy="868680"/>
+          </a:xfrm>
+          <a:prstGeom prst="ellipse">
+            <a:avLst/>
+          </a:prstGeom>
+          <a:solidFill>
+            <a:srgbClr val="2C7A8C"/>
+          </a:solidFill>
+          <a:ln>
+            <a:noFill/>
+          </a:ln>
+          <a:effectLst/>
+        </p:spPr>
+        <p:style>
+          <a:lnRef idx="1">
+            <a:schemeClr val="accent1"/>
+          </a:lnRef>
+          <a:fillRef idx="3">
+            <a:schemeClr val="accent1"/>
+          </a:fillRef>
+          <a:effectRef idx="2">
+            <a:schemeClr val="accent1"/>
+          </a:effectRef>
+          <a:fontRef idx="minor">
+            <a:schemeClr val="lt1"/>
+          </a:fontRef>
+        </p:style>
+        <p:txBody>
+          <a:bodyPr rtlCol="0" anchor="ctr"/>
+          <a:lstStyle/>
+          <a:p>
+            <a:pPr algn="ctr"/>
+          </a:p>
+        </p:txBody>
+      </p:sp>
+      <p:pic>
+        <p:nvPicPr>
+          <p:cNvPr id="5" name="Picture 4" descr="Aula09.png"/>
+          <p:cNvPicPr>
+            <a:picLocks noChangeAspect="1"/>
+          </p:cNvPicPr>
+          <p:nvPr/>
+        </p:nvPicPr>
+        <p:blipFill>
+          <a:blip r:embed="rId3"/>
+          <a:stretch>
+            <a:fillRect/>
+          </a:stretch>
+        </p:blipFill>
+        <p:spPr>
+          <a:xfrm>
+            <a:off x="1028700" y="1120140"/>
+            <a:ext cx="457200" cy="457200"/>
+          </a:xfrm>
+          <a:prstGeom prst="rect">
+            <a:avLst/>
+          </a:prstGeom>
+        </p:spPr>
+      </p:pic>
+      <p:sp>
+        <p:nvSpPr>
+          <p:cNvPr id="6" name="TextBox 5"/>
+          <p:cNvSpPr txBox="1"/>
+          <p:nvPr/>
+        </p:nvSpPr>
+        <p:spPr>
+          <a:xfrm>
+            <a:off x="457200" y="2148840"/>
+            <a:ext cx="9144000" cy="274320"/>
+          </a:xfrm>
+          <a:prstGeom prst="rect">
+            <a:avLst/>
+          </a:prstGeom>
+          <a:noFill/>
+        </p:spPr>
+        <p:txBody>
+          <a:bodyPr wrap="square">
+            <a:spAutoFit/>
+          </a:bodyPr>
+          <a:lstStyle/>
+          <a:p>
+            <a:pPr algn="l"/>
+            <a:r>
+              <a:rPr sz="1100" b="1" i="0">
+                <a:solidFill>
+                  <a:srgbClr val="E8963C"/>
+                </a:solidFill>
+                <a:latin typeface="Calibri"/>
+              </a:rPr>
+              <a:t>PENSAMENTO COMPUTACIONAL · AULA 15 DE 15</a:t>
+            </a:r>
+          </a:p>
+        </p:txBody>
+      </p:sp>
+      <p:sp>
+        <p:nvSpPr>
+          <p:cNvPr id="7" name="TextBox 6"/>
+          <p:cNvSpPr txBox="1"/>
+          <p:nvPr/>
+        </p:nvSpPr>
+        <p:spPr>
+          <a:xfrm>
+            <a:off x="457200" y="2514600"/>
+            <a:ext cx="10789920" cy="1463040"/>
+          </a:xfrm>
+          <a:prstGeom prst="rect">
+            <a:avLst/>
+          </a:prstGeom>
+          <a:noFill/>
+        </p:spPr>
+        <p:txBody>
+          <a:bodyPr wrap="square">
+            <a:spAutoFit/>
+          </a:bodyPr>
+          <a:lstStyle/>
+          <a:p>
+            <a:pPr algn="l"/>
+            <a:r>
+              <a:rPr sz="4000" b="1" i="0">
                 <a:solidFill>
                   <a:srgbClr val="FFFFFF"/>
                 </a:solidFill>
+                <a:latin typeface="Cambria"/>
               </a:rPr>
               <a:t>Fechamento para discussão</a:t>
             </a:r>
-            <a:endParaRPr lang="en-US" sz="2800" dirty="0"/>
-          </a:p>
-        </p:txBody>
-      </p:sp>
-      <p:sp>
-        <p:nvSpPr>
-          <p:cNvPr id="5" name="Text 3"/>
-          <p:cNvSpPr/>
-          <p:nvPr/>
-        </p:nvSpPr>
-        <p:spPr>
-          <a:xfrm>
-            <a:off x="713232" y="1325880"/>
-            <a:ext cx="9875520" cy="347472"/>
-          </a:xfrm>
-          <a:prstGeom prst="rect">
-            <a:avLst/>
-          </a:prstGeom>
-          <a:noFill/>
-          <a:ln/>
-        </p:spPr>
-        <p:txBody>
-          <a:bodyPr wrap="square" lIns="0" tIns="0" rIns="0" bIns="0" rtlCol="0" anchor="ctr"/>
-          <a:lstStyle/>
-          <a:p>
-            <a:pPr indent="0" marL="0">
-              <a:buNone/>
-            </a:pPr>
-            <a:r>
-              <a:rPr lang="en-US" sz="1650" dirty="0">
-                <a:solidFill>
-                  <a:srgbClr val="DDEAF2"/>
-                </a:solidFill>
-              </a:rPr>
-              <a:t>Julia e Pluto na disciplina de Pensamento Computacional</a:t>
-            </a:r>
-            <a:endParaRPr lang="en-US" sz="1650" dirty="0"/>
-          </a:p>
-        </p:txBody>
-      </p:sp>
-      <p:sp>
-        <p:nvSpPr>
-          <p:cNvPr id="6" name="Text 4"/>
-          <p:cNvSpPr/>
-          <p:nvPr/>
-        </p:nvSpPr>
-        <p:spPr>
-          <a:xfrm>
-            <a:off x="731520" y="1828800"/>
-            <a:ext cx="9692640" cy="237744"/>
-          </a:xfrm>
-          <a:prstGeom prst="rect">
-            <a:avLst/>
-          </a:prstGeom>
-          <a:noFill/>
-          <a:ln/>
-        </p:spPr>
-        <p:txBody>
-          <a:bodyPr wrap="square" lIns="0" tIns="0" rIns="0" bIns="0" rtlCol="0" anchor="ctr"/>
-          <a:lstStyle/>
-          <a:p>
-            <a:pPr indent="0" marL="0">
-              <a:buNone/>
-            </a:pPr>
-            <a:r>
-              <a:rPr lang="en-US" sz="1150" dirty="0">
-                <a:solidFill>
-                  <a:srgbClr val="9CC7D9"/>
-                </a:solidFill>
-              </a:rPr>
-              <a:t>PROFCOMP · Mestrado Profissional em Computação em Rede Nacional</a:t>
-            </a:r>
-            <a:endParaRPr lang="en-US" sz="1150" dirty="0"/>
-          </a:p>
-        </p:txBody>
-      </p:sp>
-      <p:sp>
-        <p:nvSpPr>
-          <p:cNvPr id="7" name="Shape 5"/>
-          <p:cNvSpPr/>
-          <p:nvPr/>
-        </p:nvSpPr>
-        <p:spPr>
-          <a:xfrm>
-            <a:off x="960120" y="3703320"/>
-            <a:ext cx="2651760" cy="1325880"/>
-          </a:xfrm>
-          <a:prstGeom prst="roundRect">
-            <a:avLst>
-              <a:gd name="adj" fmla="val 8276"/>
-            </a:avLst>
-          </a:prstGeom>
-          <a:solidFill>
-            <a:srgbClr val="122B3A"/>
-          </a:solidFill>
-          <a:ln w="19050">
-            <a:solidFill>
-              <a:srgbClr val="2AA7C9"/>
-            </a:solidFill>
-            <a:prstDash val="solid"/>
-          </a:ln>
-        </p:spPr>
-      </p:sp>
-      <p:sp>
-        <p:nvSpPr>
-          <p:cNvPr id="8" name="Text 6"/>
-          <p:cNvSpPr/>
-          <p:nvPr/>
-        </p:nvSpPr>
-        <p:spPr>
-          <a:xfrm>
-            <a:off x="1143000" y="3867912"/>
-            <a:ext cx="2286000" cy="201168"/>
-          </a:xfrm>
-          <a:prstGeom prst="rect">
-            <a:avLst/>
-          </a:prstGeom>
-          <a:noFill/>
-          <a:ln/>
-        </p:spPr>
-        <p:txBody>
-          <a:bodyPr wrap="square" lIns="0" tIns="0" rIns="0" bIns="0" rtlCol="0" anchor="ctr"/>
-          <a:lstStyle/>
-          <a:p>
-            <a:pPr indent="0" marL="0">
-              <a:buNone/>
-            </a:pPr>
-            <a:r>
-              <a:rPr lang="en-US" sz="1800" b="1" dirty="0">
-                <a:solidFill>
-                  <a:srgbClr val="FFFFFF"/>
-                </a:solidFill>
-              </a:rPr>
-              <a:t>código</a:t>
-            </a:r>
-            <a:endParaRPr lang="en-US" sz="1800" dirty="0"/>
-          </a:p>
-        </p:txBody>
-      </p:sp>
-      <p:sp>
-        <p:nvSpPr>
-          <p:cNvPr id="9" name="Text 7"/>
-          <p:cNvSpPr/>
-          <p:nvPr/>
-        </p:nvSpPr>
-        <p:spPr>
-          <a:xfrm>
-            <a:off x="1143000" y="4343400"/>
-            <a:ext cx="2286000" cy="411480"/>
-          </a:xfrm>
-          <a:prstGeom prst="rect">
-            <a:avLst/>
-          </a:prstGeom>
-          <a:noFill/>
-          <a:ln/>
-        </p:spPr>
-        <p:txBody>
-          <a:bodyPr wrap="square" lIns="0" tIns="0" rIns="0" bIns="0" rtlCol="0" anchor="ctr"/>
-          <a:lstStyle/>
-          <a:p>
-            <a:pPr indent="0" marL="0">
-              <a:buNone/>
-            </a:pPr>
-            <a:r>
-              <a:rPr lang="en-US" sz="1250" dirty="0">
-                <a:solidFill>
-                  <a:srgbClr val="DDEAF2"/>
-                </a:solidFill>
-              </a:rPr>
-              <a:t>variáveis</a:t>
-            </a:r>
-            <a:endParaRPr lang="en-US" sz="1250" dirty="0"/>
-          </a:p>
-          <a:p>
-            <a:pPr indent="0" marL="0">
-              <a:buNone/>
-            </a:pPr>
-            <a:r>
-              <a:rPr lang="en-US" sz="1250" dirty="0">
-                <a:solidFill>
-                  <a:srgbClr val="DDEAF2"/>
-                </a:solidFill>
-              </a:rPr>
-              <a:t>funções</a:t>
-            </a:r>
-            <a:endParaRPr lang="en-US" sz="1250" dirty="0"/>
-          </a:p>
-        </p:txBody>
-      </p:sp>
-      <p:sp>
-        <p:nvSpPr>
-          <p:cNvPr id="10" name="Shape 8"/>
-          <p:cNvSpPr/>
-          <p:nvPr/>
-        </p:nvSpPr>
-        <p:spPr>
-          <a:xfrm>
-            <a:off x="3703320" y="4361688"/>
-            <a:ext cx="777240" cy="0"/>
-          </a:xfrm>
-          <a:prstGeom prst="line">
-            <a:avLst/>
-          </a:prstGeom>
-          <a:noFill/>
-          <a:ln w="27940">
-            <a:solidFill>
-              <a:srgbClr val="2AA7C9"/>
-            </a:solidFill>
-            <a:prstDash val="solid"/>
-            <a:tailEnd type="triangle"/>
-          </a:ln>
-        </p:spPr>
-      </p:sp>
-      <p:sp>
-        <p:nvSpPr>
-          <p:cNvPr id="11" name="Shape 9"/>
-          <p:cNvSpPr/>
-          <p:nvPr/>
-        </p:nvSpPr>
-        <p:spPr>
-          <a:xfrm>
-            <a:off x="4617720" y="3703320"/>
-            <a:ext cx="2651760" cy="1325880"/>
-          </a:xfrm>
-          <a:prstGeom prst="roundRect">
-            <a:avLst>
-              <a:gd name="adj" fmla="val 8276"/>
-            </a:avLst>
-          </a:prstGeom>
-          <a:solidFill>
-            <a:srgbClr val="143F50"/>
-          </a:solidFill>
-          <a:ln w="19050">
-            <a:solidFill>
-              <a:srgbClr val="2AA7C9"/>
-            </a:solidFill>
-            <a:prstDash val="solid"/>
-          </a:ln>
-        </p:spPr>
-      </p:sp>
-      <p:sp>
-        <p:nvSpPr>
-          <p:cNvPr id="12" name="Text 10"/>
-          <p:cNvSpPr/>
-          <p:nvPr/>
-        </p:nvSpPr>
-        <p:spPr>
-          <a:xfrm>
-            <a:off x="4800600" y="3867912"/>
-            <a:ext cx="2286000" cy="201168"/>
-          </a:xfrm>
-          <a:prstGeom prst="rect">
-            <a:avLst/>
-          </a:prstGeom>
-          <a:noFill/>
-          <a:ln/>
-        </p:spPr>
-        <p:txBody>
-          <a:bodyPr wrap="square" lIns="0" tIns="0" rIns="0" bIns="0" rtlCol="0" anchor="ctr"/>
-          <a:lstStyle/>
-          <a:p>
-            <a:pPr indent="0" marL="0">
-              <a:buNone/>
-            </a:pPr>
-            <a:r>
-              <a:rPr lang="en-US" sz="1800" b="1" dirty="0">
-                <a:solidFill>
-                  <a:srgbClr val="FFFFFF"/>
-                </a:solidFill>
-              </a:rPr>
-              <a:t>modelo</a:t>
-            </a:r>
-            <a:endParaRPr lang="en-US" sz="1800" dirty="0"/>
-          </a:p>
-        </p:txBody>
-      </p:sp>
-      <p:sp>
-        <p:nvSpPr>
-          <p:cNvPr id="13" name="Text 11"/>
-          <p:cNvSpPr/>
-          <p:nvPr/>
-        </p:nvSpPr>
-        <p:spPr>
-          <a:xfrm>
-            <a:off x="4800600" y="4343400"/>
-            <a:ext cx="2286000" cy="411480"/>
-          </a:xfrm>
-          <a:prstGeom prst="rect">
-            <a:avLst/>
-          </a:prstGeom>
-          <a:noFill/>
-          <a:ln/>
-        </p:spPr>
-        <p:txBody>
-          <a:bodyPr wrap="square" lIns="0" tIns="0" rIns="0" bIns="0" rtlCol="0" anchor="ctr"/>
-          <a:lstStyle/>
-          <a:p>
-            <a:pPr indent="0" marL="0">
-              <a:buNone/>
-            </a:pPr>
-            <a:r>
-              <a:rPr lang="en-US" sz="1250" dirty="0">
-                <a:solidFill>
-                  <a:srgbClr val="DDEAF2"/>
-                </a:solidFill>
-              </a:rPr>
-              <a:t>gráfico</a:t>
-            </a:r>
-            <a:endParaRPr lang="en-US" sz="1250" dirty="0"/>
-          </a:p>
-          <a:p>
-            <a:pPr indent="0" marL="0">
-              <a:buNone/>
-            </a:pPr>
-            <a:r>
-              <a:rPr lang="en-US" sz="1250" dirty="0">
-                <a:solidFill>
-                  <a:srgbClr val="DDEAF2"/>
-                </a:solidFill>
-              </a:rPr>
-              <a:t>tabela</a:t>
-            </a:r>
-            <a:endParaRPr lang="en-US" sz="1250" dirty="0"/>
-          </a:p>
-        </p:txBody>
-      </p:sp>
-      <p:sp>
-        <p:nvSpPr>
-          <p:cNvPr id="14" name="Shape 12"/>
-          <p:cNvSpPr/>
-          <p:nvPr/>
-        </p:nvSpPr>
-        <p:spPr>
-          <a:xfrm>
-            <a:off x="7360920" y="4361688"/>
-            <a:ext cx="777240" cy="0"/>
-          </a:xfrm>
-          <a:prstGeom prst="line">
-            <a:avLst/>
-          </a:prstGeom>
-          <a:noFill/>
-          <a:ln w="27940">
-            <a:solidFill>
-              <a:srgbClr val="2AA7C9"/>
-            </a:solidFill>
-            <a:prstDash val="solid"/>
-            <a:tailEnd type="triangle"/>
-          </a:ln>
-        </p:spPr>
-      </p:sp>
-      <p:sp>
-        <p:nvSpPr>
-          <p:cNvPr id="15" name="Shape 13"/>
-          <p:cNvSpPr/>
-          <p:nvPr/>
-        </p:nvSpPr>
-        <p:spPr>
-          <a:xfrm>
-            <a:off x="8275320" y="3703320"/>
-            <a:ext cx="2651760" cy="1325880"/>
-          </a:xfrm>
-          <a:prstGeom prst="roundRect">
-            <a:avLst>
-              <a:gd name="adj" fmla="val 8276"/>
-            </a:avLst>
-          </a:prstGeom>
-          <a:solidFill>
-            <a:srgbClr val="184D5B"/>
-          </a:solidFill>
-          <a:ln w="19050">
-            <a:solidFill>
-              <a:srgbClr val="2AA7C9"/>
-            </a:solidFill>
-            <a:prstDash val="solid"/>
-          </a:ln>
-        </p:spPr>
-      </p:sp>
-      <p:sp>
-        <p:nvSpPr>
-          <p:cNvPr id="16" name="Text 14"/>
-          <p:cNvSpPr/>
-          <p:nvPr/>
-        </p:nvSpPr>
-        <p:spPr>
-          <a:xfrm>
-            <a:off x="8458200" y="3867912"/>
-            <a:ext cx="2286000" cy="201168"/>
-          </a:xfrm>
-          <a:prstGeom prst="rect">
-            <a:avLst/>
-          </a:prstGeom>
-          <a:noFill/>
-          <a:ln/>
-        </p:spPr>
-        <p:txBody>
-          <a:bodyPr wrap="square" lIns="0" tIns="0" rIns="0" bIns="0" rtlCol="0" anchor="ctr"/>
-          <a:lstStyle/>
-          <a:p>
-            <a:pPr indent="0" marL="0">
-              <a:buNone/>
-            </a:pPr>
-            <a:r>
-              <a:rPr lang="en-US" sz="1800" b="1" dirty="0">
-                <a:solidFill>
-                  <a:srgbClr val="FFFFFF"/>
-                </a:solidFill>
-              </a:rPr>
-              <a:t>discussão</a:t>
-            </a:r>
-            <a:endParaRPr lang="en-US" sz="1800" dirty="0"/>
-          </a:p>
-        </p:txBody>
-      </p:sp>
-      <p:sp>
-        <p:nvSpPr>
-          <p:cNvPr id="17" name="Text 15"/>
-          <p:cNvSpPr/>
-          <p:nvPr/>
-        </p:nvSpPr>
-        <p:spPr>
-          <a:xfrm>
-            <a:off x="8458200" y="4343400"/>
-            <a:ext cx="2286000" cy="411480"/>
-          </a:xfrm>
-          <a:prstGeom prst="rect">
-            <a:avLst/>
-          </a:prstGeom>
-          <a:noFill/>
-          <a:ln/>
-        </p:spPr>
-        <p:txBody>
-          <a:bodyPr wrap="square" lIns="0" tIns="0" rIns="0" bIns="0" rtlCol="0" anchor="ctr"/>
-          <a:lstStyle/>
-          <a:p>
-            <a:pPr indent="0" marL="0">
-              <a:buNone/>
-            </a:pPr>
-            <a:r>
-              <a:rPr lang="en-US" sz="1250" dirty="0">
-                <a:solidFill>
-                  <a:srgbClr val="DDEAF2"/>
-                </a:solidFill>
-              </a:rPr>
-              <a:t>interpretação</a:t>
-            </a:r>
-            <a:endParaRPr lang="en-US" sz="1250" dirty="0"/>
-          </a:p>
-          <a:p>
-            <a:pPr indent="0" marL="0">
-              <a:buNone/>
-            </a:pPr>
-            <a:r>
-              <a:rPr lang="en-US" sz="1250" dirty="0">
-                <a:solidFill>
-                  <a:srgbClr val="DDEAF2"/>
-                </a:solidFill>
-              </a:rPr>
-              <a:t>limites</a:t>
-            </a:r>
-            <a:endParaRPr lang="en-US" sz="1250" dirty="0"/>
-          </a:p>
-        </p:txBody>
-      </p:sp>
-      <p:sp>
-        <p:nvSpPr>
-          <p:cNvPr id="18" name="Text 16"/>
-          <p:cNvSpPr/>
-          <p:nvPr/>
-        </p:nvSpPr>
-        <p:spPr>
-          <a:xfrm>
-            <a:off x="731520" y="5715000"/>
-            <a:ext cx="10698480" cy="320040"/>
-          </a:xfrm>
-          <a:prstGeom prst="rect">
-            <a:avLst/>
-          </a:prstGeom>
-          <a:noFill/>
-          <a:ln/>
-        </p:spPr>
-        <p:txBody>
-          <a:bodyPr wrap="square" lIns="0" tIns="0" rIns="0" bIns="0" rtlCol="0" anchor="ctr"/>
-          <a:lstStyle/>
-          <a:p>
-            <a:pPr indent="0" marL="0">
-              <a:buNone/>
-            </a:pPr>
-            <a:r>
-              <a:rPr lang="en-US" sz="1500" dirty="0">
-                <a:solidFill>
-                  <a:srgbClr val="FFFFFF"/>
-                </a:solidFill>
-              </a:rPr>
-              <a:t>A linguagem aparece como meio para representar, testar, visualizar e discutir problemas.</a:t>
-            </a:r>
-            <a:endParaRPr lang="en-US" sz="1500" dirty="0"/>
-          </a:p>
-        </p:txBody>
-      </p:sp>
-      <p:sp>
-        <p:nvSpPr>
-          <p:cNvPr id="19" name="Text 17"/>
-          <p:cNvSpPr/>
-          <p:nvPr/>
-        </p:nvSpPr>
-        <p:spPr>
-          <a:xfrm>
-            <a:off x="11384280" y="6437376"/>
-            <a:ext cx="347472" cy="228600"/>
-          </a:xfrm>
-          <a:prstGeom prst="rect">
-            <a:avLst/>
-          </a:prstGeom>
-          <a:solidFill>
-            <a:srgbClr val="FFFFFF"/>
-          </a:solidFill>
-          <a:ln>
-            <a:solidFill>
-              <a:srgbClr val="FFFFFF"/>
-            </a:solidFill>
-          </a:ln>
-        </p:spPr>
-        <p:txBody>
-          <a:bodyPr wrap="square" lIns="0" tIns="0" rIns="0" bIns="0" rtlCol="0" anchor="ctr"/>
-          <a:lstStyle/>
-          <a:p>
-            <a:pPr algn="ctr" indent="0" marL="0">
-              <a:buNone/>
-            </a:pPr>
-            <a:r>
-              <a:rPr lang="en-US" sz="850" b="1" dirty="0">
-                <a:solidFill>
-                  <a:srgbClr val="0E1B2A"/>
-                </a:solidFill>
-              </a:rPr>
-              <a:t>01</a:t>
-            </a:r>
-            <a:endParaRPr lang="en-US" sz="850" dirty="0"/>
+          </a:p>
+        </p:txBody>
+      </p:sp>
+      <p:sp>
+        <p:nvSpPr>
+          <p:cNvPr id="8" name="TextBox 7"/>
+          <p:cNvSpPr txBox="1"/>
+          <p:nvPr/>
+        </p:nvSpPr>
+        <p:spPr>
+          <a:xfrm>
+            <a:off x="457200" y="3977640"/>
+            <a:ext cx="9509760" cy="1005840"/>
+          </a:xfrm>
+          <a:prstGeom prst="rect">
+            <a:avLst/>
+          </a:prstGeom>
+          <a:noFill/>
+        </p:spPr>
+        <p:txBody>
+          <a:bodyPr wrap="square">
+            <a:spAutoFit/>
+          </a:bodyPr>
+          <a:lstStyle/>
+          <a:p>
+            <a:pPr algn="l"/>
+            <a:r>
+              <a:rPr sz="1700" b="0" i="1">
+                <a:solidFill>
+                  <a:srgbClr val="C9D3DE"/>
+                </a:solidFill>
+                <a:latin typeface="Calibri"/>
+              </a:rPr>
+              <a:t>Julia e Pluto na disciplina de Pensamento Computacional — PROFCOMP, Mestrado Profissional em Computação em Rede Nacional.</a:t>
+            </a:r>
+          </a:p>
+        </p:txBody>
+      </p:sp>
+      <p:sp>
+        <p:nvSpPr>
+          <p:cNvPr id="9" name="TextBox 8"/>
+          <p:cNvSpPr txBox="1"/>
+          <p:nvPr/>
+        </p:nvSpPr>
+        <p:spPr>
+          <a:xfrm>
+            <a:off x="457200" y="6528816"/>
+            <a:ext cx="7315200" cy="256032"/>
+          </a:xfrm>
+          <a:prstGeom prst="rect">
+            <a:avLst/>
+          </a:prstGeom>
+          <a:noFill/>
+        </p:spPr>
+        <p:txBody>
+          <a:bodyPr wrap="square">
+            <a:spAutoFit/>
+          </a:bodyPr>
+          <a:lstStyle/>
+          <a:p>
+            <a:pPr algn="l"/>
+            <a:r>
+              <a:rPr sz="900" b="0" i="0">
+                <a:solidFill>
+                  <a:srgbClr val="8CA0B3"/>
+                </a:solidFill>
+                <a:latin typeface="Calibri"/>
+              </a:rPr>
+              <a:t>Aula 15 · Fechamento e Discussão</a:t>
+            </a:r>
+          </a:p>
+        </p:txBody>
+      </p:sp>
+      <p:sp>
+        <p:nvSpPr>
+          <p:cNvPr id="10" name="TextBox 9"/>
+          <p:cNvSpPr txBox="1"/>
+          <p:nvPr/>
+        </p:nvSpPr>
+        <p:spPr>
+          <a:xfrm>
+            <a:off x="10362895" y="6528816"/>
+            <a:ext cx="1371600" cy="256032"/>
+          </a:xfrm>
+          <a:prstGeom prst="rect">
+            <a:avLst/>
+          </a:prstGeom>
+          <a:noFill/>
+        </p:spPr>
+        <p:txBody>
+          <a:bodyPr wrap="square">
+            <a:spAutoFit/>
+          </a:bodyPr>
+          <a:lstStyle/>
+          <a:p>
+            <a:pPr algn="r"/>
+            <a:r>
+              <a:rPr sz="900" b="0" i="0">
+                <a:solidFill>
+                  <a:srgbClr val="8CA0B3"/>
+                </a:solidFill>
+                <a:latin typeface="Calibri"/>
+              </a:rPr>
+              <a:t>01 / 12</a:t>
+            </a:r>
           </a:p>
         </p:txBody>
       </p:sp>
